--- a/cursos/recursos/desequilibrios-de-material/08-torre-contra-dos-piezas-menores-i.pptx
+++ b/cursos/recursos/desequilibrios-de-material/08-torre-contra-dos-piezas-menores-i.pptx
@@ -3481,7 +3481,7 @@
                 </a:solidFill>
                 <a:latin typeface="Calibri"/>
               </a:rPr>
-              <a:t>Pista: Pensá en un avance de peón en el flanco de dama, aceptando perder ese peón a cambio de actividad para las torres.</a:t>
+              <a:t>Pista: Piensa en un avance de peón en el flanco de dama, aceptando perder ese peón a cambio de actividad para las torres.</a:t>
             </a:r>
           </a:p>
         </p:txBody>
@@ -3804,7 +3804,7 @@
                 </a:solidFill>
                 <a:latin typeface="Calibri"/>
               </a:rPr>
-              <a:t>Pista: Pensá en una captura directa que además centraliza la dama negra.</a:t>
+              <a:t>Pista: Piensa en una captura directa que además centraliza la dama negra.</a:t>
             </a:r>
           </a:p>
         </p:txBody>
@@ -4127,7 +4127,7 @@
                 </a:solidFill>
                 <a:latin typeface="Calibri"/>
               </a:rPr>
-              <a:t>Pista: Pensá en un salto de caballo hacia el centro que ataque la torre en f1 y abra la amenaza de mate con la torre en h3.</a:t>
+              <a:t>Pista: Piensa en un salto de caballo hacia el centro que ataque la torre en f1 y abra la amenaza de mate con la torre en h3.</a:t>
             </a:r>
           </a:p>
         </p:txBody>
@@ -4348,7 +4348,7 @@
                 </a:solidFill>
                 <a:latin typeface="Calibri"/>
               </a:rPr>
-              <a:t>•  Antes de sacrificar material para buscar complicaciones tácticas, calculá bien si el resultado realmente te favorece: dos caballos por torre y peón puede parecer suficiente compensación material, pero en una posición cerrada suele beneficiar al bando de las piezas menores.</a:t>
+              <a:t>•  Antes de sacrificar material para buscar complicaciones tácticas, calcula bien si el resultado realmente te favorece: dos caballos por torre y peón puede parecer suficiente compensación material, pero en una posición cerrada suele beneficiar al bando de las piezas menores.</a:t>
             </a:r>
           </a:p>
           <a:p>
@@ -4982,7 +4982,7 @@
                 </a:solidFill>
                 <a:latin typeface="Calibri"/>
               </a:rPr>
-              <a:t>Pista: Pensá en una captura de caballo hacia el centro que ataque directamente a la torre en d4.</a:t>
+              <a:t>Pista: Piensa en una captura de caballo hacia el centro que ataque directamente a la torre en d4.</a:t>
             </a:r>
           </a:p>
         </p:txBody>
@@ -5305,7 +5305,7 @@
                 </a:solidFill>
                 <a:latin typeface="Calibri"/>
               </a:rPr>
-              <a:t>Pista: Pensá en una captura de torre por alfil en e6, buscando transformar la partida en caballo y alfil contra torre.</a:t>
+              <a:t>Pista: Piensa en una captura de torre por alfil en e6, buscando transformar la partida en caballo y alfil contra torre.</a:t>
             </a:r>
           </a:p>
         </p:txBody>
@@ -5628,7 +5628,7 @@
                 </a:solidFill>
                 <a:latin typeface="Calibri"/>
               </a:rPr>
-              <a:t>Pista: Pensá en un caballo saltando hacia el centro, hacia una casilla desde la que ataca directamente el peón avanzado negro.</a:t>
+              <a:t>Pista: Piensa en un caballo saltando hacia el centro, hacia una casilla desde la que ataca directamente el peón avanzado negro.</a:t>
             </a:r>
           </a:p>
         </p:txBody>
@@ -5951,7 +5951,7 @@
                 </a:solidFill>
                 <a:latin typeface="Calibri"/>
               </a:rPr>
-              <a:t>Pista: Pensá en reubicar el alfil a una casilla desde la que controle la casilla de paso del peón a.</a:t>
+              <a:t>Pista: Piensa en reubicar el alfil a una casilla desde la que controle la casilla de paso del peón a.</a:t>
             </a:r>
           </a:p>
         </p:txBody>
@@ -6449,7 +6449,7 @@
                 </a:solidFill>
                 <a:latin typeface="Calibri"/>
               </a:rPr>
-              <a:t>Pista: Pensá en avanzar directamente el peón pasado, apoyado por el alfil.</a:t>
+              <a:t>Pista: Piensa en avanzar directamente el peón pasado, apoyado por el alfil.</a:t>
             </a:r>
           </a:p>
         </p:txBody>
@@ -7304,7 +7304,7 @@
                 </a:solidFill>
                 <a:latin typeface="Calibri"/>
               </a:rPr>
-              <a:t>Pista: Pensá en una captura de caballo sobre un peón del flanco de rey negro, que además deja indefensa a la torre e8.</a:t>
+              <a:t>Pista: Piensa en una captura de caballo sobre un peón del flanco de rey negro, que además deja indefensa a la torre e8.</a:t>
             </a:r>
           </a:p>
         </p:txBody>
@@ -7627,7 +7627,7 @@
                 </a:solidFill>
                 <a:latin typeface="Calibri"/>
               </a:rPr>
-              <a:t>Pista: Pensá en reubicar el alfil a una casilla central desde la que después pueda continuar su viaje hacia e1 y d6/e5.</a:t>
+              <a:t>Pista: Piensa en reubicar el alfil a una casilla central desde la que después pueda continuar su viaje hacia e1 y d6/e5.</a:t>
             </a:r>
           </a:p>
         </p:txBody>
@@ -7950,7 +7950,7 @@
                 </a:solidFill>
                 <a:latin typeface="Calibri"/>
               </a:rPr>
-              <a:t>Pista: Pensá en trasladar una de las torres blancas a una casilla desde la que ataque simultáneamente los dos peones débiles negros, sin dejarle a las negras ninguna jugada útil.</a:t>
+              <a:t>Pista: Piensa en trasladar una de las torres blancas a una casilla desde la que ataque simultáneamente los dos peones débiles negros, sin dejarle a las negras ninguna jugada útil.</a:t>
             </a:r>
           </a:p>
         </p:txBody>
@@ -8171,7 +8171,7 @@
                 </a:solidFill>
                 <a:latin typeface="Calibri"/>
               </a:rPr>
-              <a:t>•  Cuando evalúes una posición de torre y peones contra piezas menores, fijate primero si estas últimas tienen casillas fuertes reales donde instalarse: sin ellas, la velocidad de las torres suele ser decisiva.</a:t>
+              <a:t>•  Cuando evalúes una posición de torre y peones contra piezas menores, fíjate primero si estas últimas tienen casillas fuertes reales donde instalarse: sin ellas, la velocidad de las torres suele ser decisiva.</a:t>
             </a:r>
           </a:p>
           <a:p>
@@ -8346,7 +8346,7 @@
                 </a:solidFill>
                 <a:latin typeface="Calibri"/>
               </a:rPr>
-              <a:t>Jugá contra el motor la posición inicial de Yilmaz–Mamedov con el bando de las piezas menores, practicando primero fijar la estructura rival antes de intentar cualquier ganancia concreta. Después revisá la variante analizada de Leitao–Cubas para ver cómo la torre, con columna abierta a su disposición, logra imponerse sobre las dos piezas menores.</a:t>
+              <a:t>Juega contra el motor la posición inicial de Yilmaz–Mamedov con el bando de las piezas menores, practicando primero fijar la estructura rival antes de intentar cualquier ganancia concreta. Después revisa la variante analizada de Leitao–Cubas para ver cómo la torre, con columna abierta a su disposición, logra imponerse sobre las dos piezas menores.</a:t>
             </a:r>
           </a:p>
           <a:p>
@@ -8378,7 +8378,7 @@
                 </a:solidFill>
                 <a:latin typeface="Calibri"/>
               </a:rPr>
-              <a:t>En la página del curso podés recorrer cada partida con los comentarios, adivinar las jugadas clave en el tablero y continuar cualquier posición contra el motor (Stockfish). La hoja de ejercicios en PDF reúne los momentos clave de esta lección para resolver sin tablero.</a:t>
+              <a:t>En la página del curso puedes recorrer cada partida con los comentarios, adivinar las jugadas clave en el tablero y continuar cualquier posición contra el motor (Stockfish). La hoja de ejercicios en PDF reúne los momentos clave de esta lección para resolver sin tablero.</a:t>
             </a:r>
           </a:p>
         </p:txBody>
@@ -8417,7 +8417,7 @@
                 </a:solidFill>
                 <a:latin typeface="Calibri"/>
               </a:rPr>
-              <a:t>•  Primero recorré la partida completa leyendo los comentarios.</a:t>
+              <a:t>•  Primero recorre la partida completa leyendo los comentarios.</a:t>
             </a:r>
           </a:p>
           <a:p>
@@ -8433,7 +8433,7 @@
                 </a:solidFill>
                 <a:latin typeface="Calibri"/>
               </a:rPr>
-              <a:t>•  Después hacé el modo "adivinar las jugadas clave" hasta acertar todas.</a:t>
+              <a:t>•  Después haz el modo "adivinar las jugadas clave" hasta acertar todas.</a:t>
             </a:r>
           </a:p>
           <a:p>
@@ -8449,7 +8449,7 @@
                 </a:solidFill>
                 <a:latin typeface="Calibri"/>
               </a:rPr>
-              <a:t>•  Por último respondé el cuestionario y anotá con tus palabras las reglas de la lección.</a:t>
+              <a:t>•  Por último responde el cuestionario y anota con tus palabras las reglas de la lección.</a:t>
             </a:r>
           </a:p>
         </p:txBody>
@@ -9053,7 +9053,7 @@
                 </a:solidFill>
                 <a:latin typeface="Calibri"/>
               </a:rPr>
-              <a:t>•  Antes de evaluar torre contra dos piezas, mirá si esas piezas menores están coordinadas o son vulnerables por separado.</a:t>
+              <a:t>•  Antes de evaluar torre contra dos piezas, mira si esas piezas menores están coordinadas o son vulnerables por separado.</a:t>
             </a:r>
           </a:p>
           <a:p>
@@ -9069,7 +9069,7 @@
                 </a:solidFill>
                 <a:latin typeface="Calibri"/>
               </a:rPr>
-              <a:t>•  Comprobá si existen columnas abiertas: sin ellas, la torre pierde casi todo su valor práctico.</a:t>
+              <a:t>•  Comprueba si existen columnas abiertas: sin ellas, la torre pierde casi todo su valor práctico.</a:t>
             </a:r>
           </a:p>
           <a:p>
@@ -9085,7 +9085,7 @@
                 </a:solidFill>
                 <a:latin typeface="Calibri"/>
               </a:rPr>
-              <a:t>•  Con las piezas menores, fijá primero la estructura rival y creá debilidades antes de atacar.</a:t>
+              <a:t>•  Con las piezas menores, fija primero la estructura rival y crea debilidades antes de atacar.</a:t>
             </a:r>
           </a:p>
           <a:p>
@@ -9101,7 +9101,7 @@
                 </a:solidFill>
                 <a:latin typeface="Calibri"/>
               </a:rPr>
-              <a:t>•  Con la torre, buscá columnas abiertas cuanto antes: no dejes que el rival cierre el juego.</a:t>
+              <a:t>•  Con la torre, busca columnas abiertas cuanto antes: no dejes que el rival cierre el juego.</a:t>
             </a:r>
           </a:p>
           <a:p>
@@ -9117,7 +9117,7 @@
                 </a:solidFill>
                 <a:latin typeface="Calibri"/>
               </a:rPr>
-              <a:t>•  Recordá que, teniendo columnas disponibles, las torres suelen ser más rápidas para invadir que dos piezas menores coordinándose.</a:t>
+              <a:t>•  Recuerda que, teniendo columnas disponibles, las torres suelen ser más rápidas para invadir que dos piezas menores coordinándose.</a:t>
             </a:r>
           </a:p>
         </p:txBody>
@@ -9719,7 +9719,7 @@
                 </a:solidFill>
                 <a:latin typeface="Calibri"/>
               </a:rPr>
-              <a:t>Pista: Pensá en una pieza negra que pueda instalarse en una diagonal clave, atacando directamente el peón e4 y obligando a las blancas a avanzarlo.</a:t>
+              <a:t>Pista: Piensa en una pieza negra que pueda instalarse en una diagonal clave, atacando directamente el peón e4 y obligando a las blancas a avanzarlo.</a:t>
             </a:r>
           </a:p>
         </p:txBody>
